--- a/media/resources/files/Ekvivalenettuuluk_BOP_iREETTOO_JenilOrtoOor.pptx
+++ b/media/resources/files/Ekvivalenettuuluk_BOP_iREETTOO_JenilOrtoOor.pptx
@@ -14022,7 +14022,7 @@
                 <a:ea typeface="+mn-ea"/>
                 <a:cs typeface="+mn-cs"/>
               </a:rPr>
-              <a:t>Турдуу пикирлер учун ыраазычылык билдиребиз.</a:t>
+              <a:t>Түрдүү пикирлер үчүн ыраазычылык билдиребиз.</a:t>
             </a:r>
           </a:p>
           <a:p>

--- a/media/resources/files/Ekvivalenettuuluk_BOP_iREETTOO_JenilOrtoOor.pptx
+++ b/media/resources/files/Ekvivalenettuuluk_BOP_iREETTOO_JenilOrtoOor.pptx
@@ -937,7 +937,7 @@
                 <a:ea typeface="+mn-ea"/>
                 <a:cs typeface="Arial" panose="020B0604020202020204" pitchFamily="34" charset="0"/>
               </a:rPr>
-              <a:t>Бөлчөктөрдү, ондуктарды жана пайыздарды иреттөө – </a:t>
+              <a:t>Бөлчөктөрдү, ондуктарды жана пайыздарды ирээттөө – </a:t>
             </a:r>
             <a:r>
               <a:rPr kumimoji="0" lang="ru-RU" sz="2800" b="0" i="0" u="none" strike="noStrike" kern="1200" cap="none" spc="0" normalizeH="0" baseline="0" noProof="0" dirty="0">
